--- a/Diaporama_E5_Theo_Cayeux.pptx
+++ b/Diaporama_E5_Theo_Cayeux.pptx
@@ -9,8 +9,8 @@
   </p:notesMasterIdLst>
   <p:sldIdLst>
     <p:sldId id="256" r:id="rId2"/>
-    <p:sldId id="257" r:id="rId3"/>
-    <p:sldId id="258" r:id="rId4"/>
+    <p:sldId id="258" r:id="rId3"/>
+    <p:sldId id="257" r:id="rId4"/>
     <p:sldId id="259" r:id="rId5"/>
     <p:sldId id="260" r:id="rId6"/>
     <p:sldId id="261" r:id="rId7"/>
@@ -34,6 +34,13 @@
       <p:bold r:id="rId20"/>
       <p:italic r:id="rId21"/>
       <p:boldItalic r:id="rId22"/>
+    </p:embeddedFont>
+    <p:embeddedFont>
+      <p:font typeface="Instrument Sans" pitchFamily="2" charset="0"/>
+      <p:regular r:id="rId23"/>
+      <p:bold r:id="rId24"/>
+      <p:italic r:id="rId25"/>
+      <p:boldItalic r:id="rId26"/>
     </p:embeddedFont>
     <p:embeddedFont>
       <p:font typeface="Instrument Sans" pitchFamily="2" charset="0"/>
@@ -1242,6 +1249,127 @@
           <a:bodyPr/>
           <a:lstStyle/>
           <a:p>
+            <a:pPr marL="0" marR="0" lvl="0" indent="0" algn="l" defTabSz="914400" rtl="0" eaLnBrk="1" fontAlgn="auto" latinLnBrk="0" hangingPunct="1">
+              <a:lnSpc>
+                <a:spcPct val="100000"/>
+              </a:lnSpc>
+              <a:spcBef>
+                <a:spcPts val="0"/>
+              </a:spcBef>
+              <a:spcAft>
+                <a:spcPts val="0"/>
+              </a:spcAft>
+              <a:buClrTx/>
+              <a:buSzTx/>
+              <a:buFontTx/>
+              <a:buNone/>
+              <a:tabLst/>
+              <a:defRPr/>
+            </a:pPr>
+            <a:r>
+              <a:rPr lang="fr-FR" b="1" dirty="0"/>
+              <a:t>Inventaire automatisé :</a:t>
+            </a:r>
+            <a:r>
+              <a:rPr lang="fr-FR" dirty="0"/>
+              <a:t> Utilisation de </a:t>
+            </a:r>
+            <a:r>
+              <a:rPr lang="fr-FR" dirty="0" err="1"/>
+              <a:t>l'appliance</a:t>
+            </a:r>
+            <a:r>
+              <a:rPr lang="fr-FR" dirty="0"/>
+              <a:t> </a:t>
+            </a:r>
+            <a:r>
+              <a:rPr lang="fr-FR" b="1" dirty="0"/>
+              <a:t>KACE SMA (K1000)</a:t>
+            </a:r>
+            <a:r>
+              <a:rPr lang="fr-FR" dirty="0"/>
+              <a:t> pour le suivi en temps réel des assets.</a:t>
+            </a:r>
+          </a:p>
+          <a:p>
+            <a:pPr marL="0" marR="0" lvl="0" indent="0" algn="l" defTabSz="914400" rtl="0" eaLnBrk="1" fontAlgn="auto" latinLnBrk="0" hangingPunct="1">
+              <a:lnSpc>
+                <a:spcPct val="100000"/>
+              </a:lnSpc>
+              <a:spcBef>
+                <a:spcPts val="0"/>
+              </a:spcBef>
+              <a:spcAft>
+                <a:spcPts val="0"/>
+              </a:spcAft>
+              <a:buClrTx/>
+              <a:buSzTx/>
+              <a:buFontTx/>
+              <a:buNone/>
+              <a:tabLst/>
+              <a:defRPr/>
+            </a:pPr>
+            <a:r>
+              <a:rPr lang="fr-FR" b="1" dirty="0"/>
+              <a:t>Structuration de l'Annuaire :</a:t>
+            </a:r>
+            <a:r>
+              <a:rPr lang="fr-FR" dirty="0"/>
+              <a:t> Gestion de l'</a:t>
+            </a:r>
+            <a:r>
+              <a:rPr lang="fr-FR" b="1" dirty="0"/>
+              <a:t>Active Directory</a:t>
+            </a:r>
+            <a:r>
+              <a:rPr lang="fr-FR" dirty="0"/>
+              <a:t> avec application de règles de nommage strictes pour les objets et utilisateurs.</a:t>
+            </a:r>
+          </a:p>
+          <a:p>
+            <a:pPr marL="0" marR="0" lvl="0" indent="0" algn="l" defTabSz="914400" rtl="0" eaLnBrk="1" fontAlgn="auto" latinLnBrk="0" hangingPunct="1">
+              <a:lnSpc>
+                <a:spcPct val="100000"/>
+              </a:lnSpc>
+              <a:spcBef>
+                <a:spcPts val="0"/>
+              </a:spcBef>
+              <a:spcAft>
+                <a:spcPts val="0"/>
+              </a:spcAft>
+              <a:buClrTx/>
+              <a:buSzTx/>
+              <a:buFontTx/>
+              <a:buNone/>
+              <a:tabLst/>
+              <a:defRPr/>
+            </a:pPr>
+            <a:r>
+              <a:rPr lang="fr-FR" b="1" dirty="0"/>
+              <a:t>Gestion de la Mobilité (MDM) :</a:t>
+            </a:r>
+            <a:r>
+              <a:rPr lang="fr-FR" dirty="0"/>
+              <a:t> Déploiement et sécurisation de la flotte mobile via </a:t>
+            </a:r>
+            <a:r>
+              <a:rPr lang="fr-FR" b="1" dirty="0"/>
+              <a:t>Microsoft Intune</a:t>
+            </a:r>
+            <a:r>
+              <a:rPr lang="fr-FR" dirty="0"/>
+              <a:t> et </a:t>
+            </a:r>
+            <a:r>
+              <a:rPr lang="fr-FR" b="1" dirty="0"/>
+              <a:t>Samsung Knox</a:t>
+            </a:r>
+            <a:r>
+              <a:rPr lang="fr-FR" dirty="0"/>
+              <a:t>.</a:t>
+            </a:r>
+          </a:p>
+          <a:p>
             <a:endParaRPr lang="en-US" dirty="0"/>
           </a:p>
         </p:txBody>
@@ -1326,7 +1454,114 @@
           <a:bodyPr/>
           <a:lstStyle/>
           <a:p>
-            <a:endParaRPr lang="en-US" dirty="0"/>
+            <a:r>
+              <a:rPr lang="fr-FR" b="1" dirty="0"/>
+              <a:t>Méthodologie :</a:t>
+            </a:r>
+            <a:endParaRPr lang="fr-FR" dirty="0"/>
+          </a:p>
+          <a:p>
+            <a:pPr>
+              <a:buFont typeface="Arial" panose="020B0604020202020204" pitchFamily="34" charset="0"/>
+              <a:buChar char="•"/>
+            </a:pPr>
+            <a:r>
+              <a:rPr lang="fr-FR" dirty="0"/>
+              <a:t>Utilisation d'un logiciel de </a:t>
+            </a:r>
+            <a:r>
+              <a:rPr lang="fr-FR" dirty="0" err="1"/>
+              <a:t>ticketing</a:t>
+            </a:r>
+            <a:r>
+              <a:rPr lang="fr-FR" dirty="0"/>
+              <a:t> </a:t>
+            </a:r>
+            <a:r>
+              <a:rPr lang="fr-FR" dirty="0" err="1"/>
+              <a:t>topdesk</a:t>
+            </a:r>
+            <a:r>
+              <a:rPr lang="fr-FR" dirty="0"/>
+              <a:t> </a:t>
+            </a:r>
+            <a:r>
+              <a:rPr lang="fr-FR" dirty="0" err="1"/>
+              <a:t>glpi</a:t>
+            </a:r>
+            <a:r>
+              <a:rPr lang="fr-FR" dirty="0"/>
+              <a:t> </a:t>
+            </a:r>
+            <a:r>
+              <a:rPr lang="fr-FR" dirty="0" err="1"/>
+              <a:t>etc</a:t>
+            </a:r>
+            <a:endParaRPr lang="fr-FR" dirty="0"/>
+          </a:p>
+          <a:p>
+            <a:pPr marL="0" marR="0" lvl="0" indent="0" algn="l" defTabSz="914400" rtl="0" eaLnBrk="1" fontAlgn="auto" latinLnBrk="0" hangingPunct="1">
+              <a:lnSpc>
+                <a:spcPct val="100000"/>
+              </a:lnSpc>
+              <a:spcBef>
+                <a:spcPts val="0"/>
+              </a:spcBef>
+              <a:spcAft>
+                <a:spcPts val="0"/>
+              </a:spcAft>
+              <a:buClrTx/>
+              <a:buSzTx/>
+              <a:buFontTx/>
+              <a:buNone/>
+              <a:tabLst/>
+              <a:defRPr/>
+            </a:pPr>
+            <a:r>
+              <a:rPr lang="fr-FR" dirty="0"/>
+              <a:t>Application du principe de sécurité : « </a:t>
+            </a:r>
+            <a:r>
+              <a:rPr lang="fr-FR" b="1" dirty="0"/>
+              <a:t>Never Trust User</a:t>
+            </a:r>
+            <a:r>
+              <a:rPr lang="fr-FR" dirty="0"/>
+              <a:t> ».</a:t>
+            </a:r>
+          </a:p>
+          <a:p>
+            <a:pPr marL="0" marR="0" lvl="0" indent="0" algn="l" defTabSz="914400" rtl="0" eaLnBrk="1" fontAlgn="auto" latinLnBrk="0" hangingPunct="1">
+              <a:lnSpc>
+                <a:spcPct val="100000"/>
+              </a:lnSpc>
+              <a:spcBef>
+                <a:spcPts val="0"/>
+              </a:spcBef>
+              <a:spcAft>
+                <a:spcPts val="0"/>
+              </a:spcAft>
+              <a:buClrTx/>
+              <a:buSzTx/>
+              <a:buFontTx/>
+              <a:buNone/>
+              <a:tabLst/>
+              <a:defRPr/>
+            </a:pPr>
+            <a:r>
+              <a:rPr lang="fr-FR" dirty="0"/>
+              <a:t>Processus d'escalade vers les pôles spécialisés (Infra/Dev) en cas de besoin.</a:t>
+            </a:r>
+          </a:p>
+          <a:p>
+            <a:r>
+              <a:rPr lang="en-US" dirty="0" err="1"/>
+              <a:t>Toujours</a:t>
+            </a:r>
+            <a:r>
+              <a:rPr lang="en-US" dirty="0"/>
+              <a:t> noter les actions</a:t>
+            </a:r>
           </a:p>
         </p:txBody>
       </p:sp>
@@ -1410,10 +1645,129 @@
           <a:bodyPr/>
           <a:lstStyle/>
           <a:p>
-            <a:r>
-              <a:rPr lang="en-US" dirty="0"/>
-              <a:t>Transition: fade, duration=0.7s</a:t>
-            </a:r>
+            <a:pPr marL="0" marR="0" lvl="0" indent="0" algn="l" defTabSz="914400" rtl="0" eaLnBrk="1" fontAlgn="auto" latinLnBrk="0" hangingPunct="1">
+              <a:lnSpc>
+                <a:spcPct val="100000"/>
+              </a:lnSpc>
+              <a:spcBef>
+                <a:spcPts val="0"/>
+              </a:spcBef>
+              <a:spcAft>
+                <a:spcPts val="0"/>
+              </a:spcAft>
+              <a:buClrTx/>
+              <a:buSzTx/>
+              <a:buFontTx/>
+              <a:buNone/>
+              <a:tabLst/>
+              <a:defRPr/>
+            </a:pPr>
+            <a:r>
+              <a:rPr lang="fr-FR" dirty="0"/>
+              <a:t>À l'IGBMC, j'ai travaillé sur le déploiement de </a:t>
+            </a:r>
+            <a:r>
+              <a:rPr lang="fr-FR" b="1" dirty="0"/>
+              <a:t>Windows 11</a:t>
+            </a:r>
+            <a:r>
+              <a:rPr lang="fr-FR" dirty="0"/>
+              <a:t> via </a:t>
+            </a:r>
+            <a:r>
+              <a:rPr lang="fr-FR" b="1" dirty="0"/>
+              <a:t>KACE SDA (K2000)</a:t>
+            </a:r>
+            <a:r>
+              <a:rPr lang="fr-FR" dirty="0"/>
+              <a:t>. </a:t>
+            </a:r>
+          </a:p>
+          <a:p>
+            <a:pPr marL="0" marR="0" lvl="0" indent="0" algn="l" defTabSz="914400" rtl="0" eaLnBrk="1" fontAlgn="auto" latinLnBrk="0" hangingPunct="1">
+              <a:lnSpc>
+                <a:spcPct val="100000"/>
+              </a:lnSpc>
+              <a:spcBef>
+                <a:spcPts val="0"/>
+              </a:spcBef>
+              <a:spcAft>
+                <a:spcPts val="0"/>
+              </a:spcAft>
+              <a:buClrTx/>
+              <a:buSzTx/>
+              <a:buFontTx/>
+              <a:buNone/>
+              <a:tabLst/>
+              <a:defRPr/>
+            </a:pPr>
+            <a:r>
+              <a:rPr lang="fr-FR" dirty="0"/>
+              <a:t>J'ai créé des environnements de boot </a:t>
+            </a:r>
+            <a:r>
+              <a:rPr lang="fr-FR" b="1" dirty="0"/>
+              <a:t>KBE</a:t>
+            </a:r>
+            <a:r>
+              <a:rPr lang="fr-FR" dirty="0"/>
+              <a:t> personnalisés. J'ai configuré le boot </a:t>
+            </a:r>
+            <a:r>
+              <a:rPr lang="fr-FR" b="1" dirty="0"/>
+              <a:t>PXE</a:t>
+            </a:r>
+            <a:r>
+              <a:rPr lang="fr-FR" dirty="0"/>
+              <a:t> et sécurisé les </a:t>
+            </a:r>
+            <a:r>
+              <a:rPr lang="fr-FR" dirty="0" err="1"/>
+              <a:t>firmwares</a:t>
+            </a:r>
+            <a:r>
+              <a:rPr lang="fr-FR" dirty="0"/>
+              <a:t> via l'activation du </a:t>
+            </a:r>
+            <a:r>
+              <a:rPr lang="fr-FR" b="1" dirty="0"/>
+              <a:t>TPM 2.0</a:t>
+            </a:r>
+            <a:r>
+              <a:rPr lang="fr-FR" dirty="0"/>
+              <a:t> et du </a:t>
+            </a:r>
+            <a:r>
+              <a:rPr lang="fr-FR" b="1" dirty="0"/>
+              <a:t>Secure Boot</a:t>
+            </a:r>
+            <a:r>
+              <a:rPr lang="fr-FR" dirty="0"/>
+              <a:t>.</a:t>
+            </a:r>
+          </a:p>
+          <a:p>
+            <a:pPr marL="0" marR="0" lvl="0" indent="0" algn="l" defTabSz="914400" rtl="0" eaLnBrk="1" fontAlgn="auto" latinLnBrk="0" hangingPunct="1">
+              <a:lnSpc>
+                <a:spcPct val="100000"/>
+              </a:lnSpc>
+              <a:spcBef>
+                <a:spcPts val="0"/>
+              </a:spcBef>
+              <a:spcAft>
+                <a:spcPts val="0"/>
+              </a:spcAft>
+              <a:buClrTx/>
+              <a:buSzTx/>
+              <a:buFontTx/>
+              <a:buNone/>
+              <a:tabLst/>
+              <a:defRPr/>
+            </a:pPr>
+            <a:endParaRPr lang="fr-FR" dirty="0"/>
+          </a:p>
+          <a:p>
+            <a:endParaRPr lang="fr-FR" dirty="0"/>
           </a:p>
         </p:txBody>
       </p:sp>
@@ -1497,6 +1851,139 @@
           <a:bodyPr/>
           <a:lstStyle/>
           <a:p>
+            <a:pPr marL="0" marR="0" lvl="0" indent="0" algn="l" defTabSz="914400" rtl="0" eaLnBrk="1" fontAlgn="auto" latinLnBrk="0" hangingPunct="1">
+              <a:lnSpc>
+                <a:spcPct val="100000"/>
+              </a:lnSpc>
+              <a:spcBef>
+                <a:spcPts val="0"/>
+              </a:spcBef>
+              <a:spcAft>
+                <a:spcPts val="0"/>
+              </a:spcAft>
+              <a:buClrTx/>
+              <a:buSzTx/>
+              <a:buFontTx/>
+              <a:buNone/>
+              <a:tabLst/>
+              <a:defRPr/>
+            </a:pPr>
+            <a:r>
+              <a:rPr lang="fr-FR" dirty="0"/>
+              <a:t>J'ai mis en place du provisioning </a:t>
+            </a:r>
+            <a:r>
+              <a:rPr lang="fr-FR" b="1" dirty="0"/>
+              <a:t>« </a:t>
+            </a:r>
+            <a:r>
+              <a:rPr lang="fr-FR" b="1" dirty="0" err="1"/>
+              <a:t>Zero</a:t>
+            </a:r>
+            <a:r>
+              <a:rPr lang="fr-FR" b="1" dirty="0"/>
+              <a:t> </a:t>
+            </a:r>
+            <a:r>
+              <a:rPr lang="fr-FR" b="1" dirty="0" err="1"/>
+              <a:t>Touch</a:t>
+            </a:r>
+            <a:r>
+              <a:rPr lang="fr-FR" b="1" dirty="0"/>
+              <a:t> »</a:t>
+            </a:r>
+            <a:r>
+              <a:rPr lang="fr-FR" dirty="0"/>
+              <a:t>.</a:t>
+            </a:r>
+          </a:p>
+          <a:p>
+            <a:pPr marL="0" marR="0" lvl="0" indent="0" algn="l" defTabSz="914400" rtl="0" eaLnBrk="1" fontAlgn="auto" latinLnBrk="0" hangingPunct="1">
+              <a:lnSpc>
+                <a:spcPct val="100000"/>
+              </a:lnSpc>
+              <a:spcBef>
+                <a:spcPts val="0"/>
+              </a:spcBef>
+              <a:spcAft>
+                <a:spcPts val="0"/>
+              </a:spcAft>
+              <a:buClrTx/>
+              <a:buSzTx/>
+              <a:buFontTx/>
+              <a:buNone/>
+              <a:tabLst/>
+              <a:defRPr/>
+            </a:pPr>
+            <a:r>
+              <a:rPr lang="fr-FR" dirty="0"/>
+              <a:t>Grâce à </a:t>
+            </a:r>
+            <a:r>
+              <a:rPr lang="fr-FR" b="1" dirty="0"/>
+              <a:t>Apple </a:t>
+            </a:r>
+            <a:r>
+              <a:rPr lang="fr-FR" b="1" dirty="0" err="1"/>
+              <a:t>Device</a:t>
+            </a:r>
+            <a:r>
+              <a:rPr lang="fr-FR" b="1" dirty="0"/>
+              <a:t> </a:t>
+            </a:r>
+            <a:r>
+              <a:rPr lang="fr-FR" b="1" dirty="0" err="1"/>
+              <a:t>Enrollment</a:t>
+            </a:r>
+            <a:r>
+              <a:rPr lang="fr-FR" b="1" dirty="0"/>
+              <a:t> (ADE)</a:t>
+            </a:r>
+            <a:r>
+              <a:rPr lang="fr-FR" dirty="0"/>
+              <a:t> et </a:t>
+            </a:r>
+            <a:r>
+              <a:rPr lang="fr-FR" b="1" dirty="0" err="1"/>
+              <a:t>Mosyle</a:t>
+            </a:r>
+            <a:r>
+              <a:rPr lang="fr-FR" dirty="0"/>
+              <a:t>, le poste se configure automatiquement dès sa sortie du carton.</a:t>
+            </a:r>
+          </a:p>
+          <a:p>
+            <a:pPr marL="0" marR="0" lvl="0" indent="0" algn="l" defTabSz="914400" rtl="0" eaLnBrk="1" fontAlgn="auto" latinLnBrk="0" hangingPunct="1">
+              <a:lnSpc>
+                <a:spcPct val="100000"/>
+              </a:lnSpc>
+              <a:spcBef>
+                <a:spcPts val="0"/>
+              </a:spcBef>
+              <a:spcAft>
+                <a:spcPts val="0"/>
+              </a:spcAft>
+              <a:buClrTx/>
+              <a:buSzTx/>
+              <a:buFontTx/>
+              <a:buNone/>
+              <a:tabLst/>
+              <a:defRPr/>
+            </a:pPr>
+            <a:r>
+              <a:rPr lang="fr-FR" dirty="0"/>
+              <a:t>J'ai automatisé l'après-installation via des </a:t>
+            </a:r>
+            <a:r>
+              <a:rPr lang="fr-FR" b="1" dirty="0"/>
+              <a:t>scripts Bash</a:t>
+            </a:r>
+            <a:r>
+              <a:rPr lang="fr-FR" dirty="0"/>
+              <a:t> pour le nommage et le montage des lecteurs réseau.</a:t>
+            </a:r>
+          </a:p>
+          <a:p>
             <a:endParaRPr lang="en-US" dirty="0"/>
           </a:p>
         </p:txBody>
@@ -1581,7 +2068,153 @@
           <a:bodyPr/>
           <a:lstStyle/>
           <a:p>
-            <a:endParaRPr lang="en-US" dirty="0"/>
+            <a:pPr marL="0" marR="0" lvl="0" indent="0" algn="l" defTabSz="914400" rtl="0" eaLnBrk="1" fontAlgn="auto" latinLnBrk="0" hangingPunct="1">
+              <a:lnSpc>
+                <a:spcPct val="100000"/>
+              </a:lnSpc>
+              <a:spcBef>
+                <a:spcPts val="0"/>
+              </a:spcBef>
+              <a:spcAft>
+                <a:spcPts val="0"/>
+              </a:spcAft>
+              <a:buClrTx/>
+              <a:buSzTx/>
+              <a:buFontTx/>
+              <a:buNone/>
+              <a:tabLst/>
+              <a:defRPr/>
+            </a:pPr>
+            <a:r>
+              <a:rPr lang="fr-FR" b="1" dirty="0"/>
+              <a:t>Projet MDM (EMHA) :</a:t>
+            </a:r>
+            <a:r>
+              <a:rPr lang="fr-FR" dirty="0"/>
+              <a:t> Analyse des besoins sur le terrain et définition des stratégies avec les services métiers. Phase de test (POC) avant mise en production globale.</a:t>
+            </a:r>
+          </a:p>
+          <a:p>
+            <a:pPr marL="0" marR="0" lvl="0" indent="0" algn="l" defTabSz="914400" rtl="0" eaLnBrk="1" fontAlgn="auto" latinLnBrk="0" hangingPunct="1">
+              <a:lnSpc>
+                <a:spcPct val="100000"/>
+              </a:lnSpc>
+              <a:spcBef>
+                <a:spcPts val="0"/>
+              </a:spcBef>
+              <a:spcAft>
+                <a:spcPts val="0"/>
+              </a:spcAft>
+              <a:buClrTx/>
+              <a:buSzTx/>
+              <a:buFontTx/>
+              <a:buNone/>
+              <a:tabLst/>
+              <a:defRPr/>
+            </a:pPr>
+            <a:r>
+              <a:rPr lang="fr-FR" b="1" dirty="0"/>
+              <a:t>Intégration Lenovo (IGBMC) :</a:t>
+            </a:r>
+            <a:r>
+              <a:rPr lang="fr-FR" dirty="0"/>
+              <a:t> Adaptation de la chaîne de déploiement (nouveaux drivers, environnements KBE spécifiques). Gestion technique du </a:t>
+            </a:r>
+            <a:r>
+              <a:rPr lang="fr-FR" b="1" dirty="0" err="1"/>
+              <a:t>Passthrough</a:t>
+            </a:r>
+            <a:r>
+              <a:rPr lang="fr-FR" b="1" dirty="0"/>
+              <a:t> d'adresse MAC</a:t>
+            </a:r>
+            <a:r>
+              <a:rPr lang="fr-FR" dirty="0"/>
+              <a:t> pour les stations d'accueil (docks). Rédaction de la documentation technique pour l'équipe.</a:t>
+            </a:r>
+          </a:p>
+          <a:p>
+            <a:pPr marL="0" marR="0" lvl="0" indent="0" algn="l" defTabSz="914400" rtl="0" eaLnBrk="1" fontAlgn="auto" latinLnBrk="0" hangingPunct="1">
+              <a:lnSpc>
+                <a:spcPct val="100000"/>
+              </a:lnSpc>
+              <a:spcBef>
+                <a:spcPts val="0"/>
+              </a:spcBef>
+              <a:spcAft>
+                <a:spcPts val="0"/>
+              </a:spcAft>
+              <a:buClrTx/>
+              <a:buSzTx/>
+              <a:buFontTx/>
+              <a:buNone/>
+              <a:tabLst/>
+              <a:defRPr/>
+            </a:pPr>
+            <a:endParaRPr lang="fr-FR" dirty="0"/>
+          </a:p>
+          <a:p>
+            <a:pPr marL="0" marR="0" lvl="0" indent="0" algn="l" defTabSz="914400" rtl="0" eaLnBrk="1" fontAlgn="auto" latinLnBrk="0" hangingPunct="1">
+              <a:lnSpc>
+                <a:spcPct val="100000"/>
+              </a:lnSpc>
+              <a:spcBef>
+                <a:spcPts val="0"/>
+              </a:spcBef>
+              <a:spcAft>
+                <a:spcPts val="0"/>
+              </a:spcAft>
+              <a:buClrTx/>
+              <a:buSzTx/>
+              <a:buFontTx/>
+              <a:buNone/>
+              <a:tabLst/>
+              <a:defRPr/>
+            </a:pPr>
+            <a:endParaRPr lang="fr-FR" dirty="0"/>
+          </a:p>
+          <a:p>
+            <a:pPr marL="0" marR="0" lvl="0" indent="0" algn="l" defTabSz="914400" rtl="0" eaLnBrk="1" fontAlgn="auto" latinLnBrk="0" hangingPunct="1">
+              <a:lnSpc>
+                <a:spcPct val="100000"/>
+              </a:lnSpc>
+              <a:spcBef>
+                <a:spcPts val="0"/>
+              </a:spcBef>
+              <a:spcAft>
+                <a:spcPts val="0"/>
+              </a:spcAft>
+              <a:buClrTx/>
+              <a:buSzTx/>
+              <a:buFontTx/>
+              <a:buNone/>
+              <a:tabLst/>
+              <a:defRPr/>
+            </a:pPr>
+            <a:endParaRPr lang="fr-FR" dirty="0"/>
+          </a:p>
+          <a:p>
+            <a:pPr marL="0" marR="0" lvl="0" indent="0" algn="l" defTabSz="914400" rtl="0" eaLnBrk="1" fontAlgn="auto" latinLnBrk="0" hangingPunct="1">
+              <a:lnSpc>
+                <a:spcPct val="100000"/>
+              </a:lnSpc>
+              <a:spcBef>
+                <a:spcPts val="0"/>
+              </a:spcBef>
+              <a:spcAft>
+                <a:spcPts val="0"/>
+              </a:spcAft>
+              <a:buClrTx/>
+              <a:buSzTx/>
+              <a:buFontTx/>
+              <a:buNone/>
+              <a:tabLst/>
+              <a:defRPr/>
+            </a:pPr>
+            <a:endParaRPr lang="fr-FR" dirty="0"/>
+          </a:p>
+          <a:p>
+            <a:endParaRPr lang="fr-FR" dirty="0"/>
           </a:p>
         </p:txBody>
       </p:sp>
@@ -6401,21 +7034,21 @@
                 </a:gradFill>
                 <a:latin typeface="Instrument sans" pitchFamily="2" charset="0"/>
               </a:rPr>
-              <a:t>Mon positionnement en tant que futur admin</a:t>
+              <a:t>Ambition futur </a:t>
             </a:r>
           </a:p>
         </p:txBody>
       </p:sp>
       <p:sp>
         <p:nvSpPr>
-          <p:cNvPr id="3" name="Shape 1"/>
+          <p:cNvPr id="9" name="Shape 5"/>
           <p:cNvSpPr/>
           <p:nvPr/>
         </p:nvSpPr>
         <p:spPr>
           <a:xfrm>
-            <a:off x="793790" y="3286244"/>
-            <a:ext cx="4196358" cy="2819519"/>
+            <a:off x="653818" y="3155599"/>
+            <a:ext cx="10955086" cy="1484538"/>
           </a:xfrm>
           <a:prstGeom prst="roundRect">
             <a:avLst>
@@ -6434,272 +7067,11 @@
             <a:prstDash val="solid"/>
           </a:ln>
         </p:spPr>
-      </p:sp>
-      <p:sp>
-        <p:nvSpPr>
-          <p:cNvPr id="5" name="Text 2"/>
-          <p:cNvSpPr/>
-          <p:nvPr/>
-        </p:nvSpPr>
-        <p:spPr>
-          <a:xfrm>
-            <a:off x="1142524" y="3543538"/>
-            <a:ext cx="3590330" cy="1062990"/>
-          </a:xfrm>
-          <a:prstGeom prst="rect">
-            <a:avLst/>
-          </a:prstGeom>
-          <a:noFill/>
-          <a:ln/>
-        </p:spPr>
         <p:txBody>
-          <a:bodyPr wrap="square" lIns="0" tIns="0" rIns="0" bIns="0" rtlCol="0" anchor="t"/>
+          <a:bodyPr/>
           <a:lstStyle/>
           <a:p>
-            <a:pPr marL="0" indent="0" algn="l">
-              <a:lnSpc>
-                <a:spcPts val="2750"/>
-              </a:lnSpc>
-              <a:buNone/>
-            </a:pPr>
-            <a:r>
-              <a:rPr lang="fr-FR" sz="2200">
-                <a:solidFill>
-                  <a:schemeClr val="bg1"/>
-                </a:solidFill>
-                <a:latin typeface="Instrument sans" pitchFamily="2" charset="0"/>
-                <a:ea typeface="Instrument Sans Semi Bold" pitchFamily="34" charset="-122"/>
-                <a:cs typeface="Instrument Sans Semi Bold" pitchFamily="34" charset="-120"/>
-              </a:rPr>
-              <a:t>La virtualisation n'est plus dominée par un seul acteur</a:t>
-            </a:r>
-            <a:endParaRPr lang="fr-FR" sz="2200">
-              <a:solidFill>
-                <a:schemeClr val="bg1"/>
-              </a:solidFill>
-              <a:latin typeface="Instrument sans" pitchFamily="2" charset="0"/>
-            </a:endParaRPr>
-          </a:p>
-        </p:txBody>
-      </p:sp>
-      <p:sp>
-        <p:nvSpPr>
-          <p:cNvPr id="6" name="Shape 3"/>
-          <p:cNvSpPr/>
-          <p:nvPr/>
-        </p:nvSpPr>
-        <p:spPr>
-          <a:xfrm>
-            <a:off x="5216962" y="3286244"/>
-            <a:ext cx="4196358" cy="2819519"/>
-          </a:xfrm>
-          <a:prstGeom prst="roundRect">
-            <a:avLst>
-              <a:gd name="adj" fmla="val 5189"/>
-            </a:avLst>
-          </a:prstGeom>
-          <a:solidFill>
-            <a:srgbClr val="2A2A2D">
-              <a:alpha val="95000"/>
-            </a:srgbClr>
-          </a:solidFill>
-          <a:ln w="30480">
-            <a:solidFill>
-              <a:srgbClr val="56565B"/>
-            </a:solidFill>
-            <a:prstDash val="solid"/>
-          </a:ln>
-        </p:spPr>
-      </p:sp>
-      <p:sp>
-        <p:nvSpPr>
-          <p:cNvPr id="8" name="Text 4"/>
-          <p:cNvSpPr/>
-          <p:nvPr/>
-        </p:nvSpPr>
-        <p:spPr>
-          <a:xfrm>
-            <a:off x="5565696" y="3543538"/>
-            <a:ext cx="3590330" cy="1062990"/>
-          </a:xfrm>
-          <a:prstGeom prst="rect">
-            <a:avLst/>
-          </a:prstGeom>
-          <a:noFill/>
-          <a:ln/>
-        </p:spPr>
-        <p:txBody>
-          <a:bodyPr wrap="square" lIns="0" tIns="0" rIns="0" bIns="0" rtlCol="0" anchor="t"/>
-          <a:lstStyle/>
-          <a:p>
-            <a:pPr marL="0" indent="0" algn="l">
-              <a:lnSpc>
-                <a:spcPts val="2750"/>
-              </a:lnSpc>
-              <a:buNone/>
-            </a:pPr>
-            <a:r>
-              <a:rPr lang="fr-FR" sz="2200">
-                <a:solidFill>
-                  <a:schemeClr val="bg1"/>
-                </a:solidFill>
-                <a:latin typeface="Instrument sans" pitchFamily="2" charset="0"/>
-                <a:ea typeface="Instrument Sans Semi Bold" pitchFamily="34" charset="-122"/>
-                <a:cs typeface="Instrument Sans Semi Bold" pitchFamily="34" charset="-120"/>
-              </a:rPr>
-              <a:t>L'importance de l'Open-Source dans les infrastructures critiques</a:t>
-            </a:r>
-            <a:endParaRPr lang="fr-FR" sz="2200">
-              <a:solidFill>
-                <a:schemeClr val="bg1"/>
-              </a:solidFill>
-              <a:latin typeface="Instrument sans" pitchFamily="2" charset="0"/>
-            </a:endParaRPr>
-          </a:p>
-        </p:txBody>
-      </p:sp>
-      <p:sp>
-        <p:nvSpPr>
-          <p:cNvPr id="9" name="Shape 5"/>
-          <p:cNvSpPr/>
-          <p:nvPr/>
-        </p:nvSpPr>
-        <p:spPr>
-          <a:xfrm>
-            <a:off x="9640133" y="3286244"/>
-            <a:ext cx="4196358" cy="2819519"/>
-          </a:xfrm>
-          <a:prstGeom prst="roundRect">
-            <a:avLst>
-              <a:gd name="adj" fmla="val 5189"/>
-            </a:avLst>
-          </a:prstGeom>
-          <a:solidFill>
-            <a:srgbClr val="2A2A2D">
-              <a:alpha val="95000"/>
-            </a:srgbClr>
-          </a:solidFill>
-          <a:ln w="30480">
-            <a:solidFill>
-              <a:srgbClr val="56565B"/>
-            </a:solidFill>
-            <a:prstDash val="solid"/>
-          </a:ln>
-        </p:spPr>
-      </p:sp>
-      <p:sp>
-        <p:nvSpPr>
-          <p:cNvPr id="11" name="Text 6"/>
-          <p:cNvSpPr/>
-          <p:nvPr/>
-        </p:nvSpPr>
-        <p:spPr>
-          <a:xfrm>
-            <a:off x="9988868" y="3543538"/>
-            <a:ext cx="2835235" cy="354330"/>
-          </a:xfrm>
-          <a:prstGeom prst="rect">
-            <a:avLst/>
-          </a:prstGeom>
-          <a:noFill/>
-          <a:ln/>
-        </p:spPr>
-        <p:txBody>
-          <a:bodyPr wrap="none" lIns="0" tIns="0" rIns="0" bIns="0" rtlCol="0" anchor="t"/>
-          <a:lstStyle/>
-          <a:p>
-            <a:pPr marL="0" indent="0" algn="l">
-              <a:lnSpc>
-                <a:spcPts val="2750"/>
-              </a:lnSpc>
-              <a:buNone/>
-            </a:pPr>
-            <a:r>
-              <a:rPr lang="fr-FR" sz="2200">
-                <a:solidFill>
-                  <a:schemeClr val="bg1"/>
-                </a:solidFill>
-                <a:latin typeface="Instrument sans" pitchFamily="2" charset="0"/>
-                <a:ea typeface="Instrument Sans Semi Bold" pitchFamily="34" charset="-122"/>
-                <a:cs typeface="Instrument Sans Semi Bold" pitchFamily="34" charset="-120"/>
-              </a:rPr>
-              <a:t>Mon atout :</a:t>
-            </a:r>
-            <a:endParaRPr lang="fr-FR" sz="2200">
-              <a:solidFill>
-                <a:schemeClr val="bg1"/>
-              </a:solidFill>
-              <a:latin typeface="Instrument sans" pitchFamily="2" charset="0"/>
-            </a:endParaRPr>
-          </a:p>
-        </p:txBody>
-      </p:sp>
-      <p:sp>
-        <p:nvSpPr>
-          <p:cNvPr id="12" name="Text 7"/>
-          <p:cNvSpPr/>
-          <p:nvPr/>
-        </p:nvSpPr>
-        <p:spPr>
-          <a:xfrm>
-            <a:off x="9988868" y="4033957"/>
-            <a:ext cx="3590330" cy="1814513"/>
-          </a:xfrm>
-          <a:prstGeom prst="rect">
-            <a:avLst/>
-          </a:prstGeom>
-          <a:noFill/>
-          <a:ln/>
-        </p:spPr>
-        <p:txBody>
-          <a:bodyPr wrap="square" lIns="0" tIns="0" rIns="0" bIns="0" rtlCol="0" anchor="t"/>
-          <a:lstStyle/>
-          <a:p>
-            <a:pPr marL="0" indent="0" algn="l">
-              <a:lnSpc>
-                <a:spcPts val="2850"/>
-              </a:lnSpc>
-              <a:buNone/>
-            </a:pPr>
-            <a:r>
-              <a:rPr lang="fr-FR" sz="1750" dirty="0">
-                <a:solidFill>
-                  <a:schemeClr val="bg1"/>
-                </a:solidFill>
-                <a:latin typeface="Instrument sans" pitchFamily="2" charset="0"/>
-                <a:ea typeface="Instrument Sans Medium" pitchFamily="34" charset="-122"/>
-                <a:cs typeface="Instrument Sans Medium" pitchFamily="34" charset="-120"/>
-              </a:rPr>
-              <a:t>La maîtrise simultanée de VMware et de </a:t>
-            </a:r>
-            <a:r>
-              <a:rPr lang="fr-FR" sz="1750" dirty="0" err="1">
-                <a:solidFill>
-                  <a:schemeClr val="bg1"/>
-                </a:solidFill>
-                <a:latin typeface="Instrument sans" pitchFamily="2" charset="0"/>
-                <a:ea typeface="Instrument Sans Medium" pitchFamily="34" charset="-122"/>
-                <a:cs typeface="Instrument Sans Medium" pitchFamily="34" charset="-120"/>
-              </a:rPr>
-              <a:t>Proxmox</a:t>
-            </a:r>
-            <a:r>
-              <a:rPr lang="fr-FR" sz="1750" dirty="0">
-                <a:solidFill>
-                  <a:schemeClr val="bg1"/>
-                </a:solidFill>
-                <a:latin typeface="Instrument sans" pitchFamily="2" charset="0"/>
-                <a:ea typeface="Instrument Sans Medium" pitchFamily="34" charset="-122"/>
-                <a:cs typeface="Instrument Sans Medium" pitchFamily="34" charset="-120"/>
-              </a:rPr>
-              <a:t> me permet d’être capable d’effectuer le changement dans une entreprise.</a:t>
-            </a:r>
-            <a:endParaRPr lang="fr-FR" sz="1750" dirty="0">
-              <a:solidFill>
-                <a:schemeClr val="bg1"/>
-              </a:solidFill>
-              <a:latin typeface="Instrument sans" pitchFamily="2" charset="0"/>
-            </a:endParaRPr>
+            <a:endParaRPr lang="fr-FR" dirty="0"/>
           </a:p>
         </p:txBody>
       </p:sp>
@@ -6757,6 +7129,288 @@
               </a:solidFill>
               <a:latin typeface="Instrument sans" pitchFamily="2" charset="0"/>
             </a:endParaRPr>
+          </a:p>
+        </p:txBody>
+      </p:sp>
+      <p:sp>
+        <p:nvSpPr>
+          <p:cNvPr id="10" name="Rectangle 3">
+            <a:extLst>
+              <a:ext uri="{FF2B5EF4-FFF2-40B4-BE49-F238E27FC236}">
+                <a16:creationId xmlns:a16="http://schemas.microsoft.com/office/drawing/2014/main" id="{856B5D54-8CC9-4529-8A9E-31C60E0094E0}"/>
+              </a:ext>
+            </a:extLst>
+          </p:cNvPr>
+          <p:cNvSpPr>
+            <a:spLocks noChangeArrowheads="1"/>
+          </p:cNvSpPr>
+          <p:nvPr/>
+        </p:nvSpPr>
+        <p:spPr bwMode="auto">
+          <a:xfrm>
+            <a:off x="793790" y="3159204"/>
+            <a:ext cx="10536819" cy="1477328"/>
+          </a:xfrm>
+          <a:prstGeom prst="rect">
+            <a:avLst/>
+          </a:prstGeom>
+          <a:noFill/>
+          <a:ln>
+            <a:noFill/>
+          </a:ln>
+          <a:effectLst/>
+          <a:extLst>
+            <a:ext uri="{909E8E84-426E-40DD-AFC4-6F175D3DCCD1}">
+              <a14:hiddenFill xmlns:a14="http://schemas.microsoft.com/office/drawing/2010/main">
+                <a:solidFill>
+                  <a:schemeClr val="accent1"/>
+                </a:solidFill>
+              </a14:hiddenFill>
+            </a:ext>
+            <a:ext uri="{91240B29-F687-4F45-9708-019B960494DF}">
+              <a14:hiddenLine xmlns:a14="http://schemas.microsoft.com/office/drawing/2010/main" w="9525">
+                <a:solidFill>
+                  <a:schemeClr val="tx1"/>
+                </a:solidFill>
+                <a:miter lim="800000"/>
+                <a:headEnd/>
+                <a:tailEnd/>
+              </a14:hiddenLine>
+            </a:ext>
+            <a:ext uri="{AF507438-7753-43E0-B8FC-AC1667EBCBE1}">
+              <a14:hiddenEffects xmlns:a14="http://schemas.microsoft.com/office/drawing/2010/main">
+                <a:effectLst>
+                  <a:outerShdw dist="35921" dir="2700000" algn="ctr" rotWithShape="0">
+                    <a:schemeClr val="bg2"/>
+                  </a:outerShdw>
+                </a:effectLst>
+              </a14:hiddenEffects>
+            </a:ext>
+          </a:extLst>
+        </p:spPr>
+        <p:txBody>
+          <a:bodyPr vert="horz" wrap="square" lIns="91440" tIns="45720" rIns="91440" bIns="45720" numCol="1" anchor="ctr" anchorCtr="0" compatLnSpc="1">
+            <a:prstTxWarp prst="textNoShape">
+              <a:avLst/>
+            </a:prstTxWarp>
+            <a:spAutoFit/>
+          </a:bodyPr>
+          <a:lstStyle/>
+          <a:p>
+            <a:pPr eaLnBrk="0" fontAlgn="base" hangingPunct="0">
+              <a:spcBef>
+                <a:spcPct val="0"/>
+              </a:spcBef>
+              <a:spcAft>
+                <a:spcPct val="0"/>
+              </a:spcAft>
+              <a:buFontTx/>
+              <a:buChar char="•"/>
+            </a:pPr>
+            <a:r>
+              <a:rPr lang="fr-FR" altLang="fr-FR" sz="1750" b="1" dirty="0">
+                <a:solidFill>
+                  <a:schemeClr val="bg1"/>
+                </a:solidFill>
+                <a:latin typeface="Instrument Sans" pitchFamily="2" charset="0"/>
+              </a:rPr>
+              <a:t>Objectif à court terme :</a:t>
+            </a:r>
+            <a:r>
+              <a:rPr lang="fr-FR" altLang="fr-FR" sz="1750" dirty="0">
+                <a:solidFill>
+                  <a:schemeClr val="bg1"/>
+                </a:solidFill>
+                <a:latin typeface="Instrument Sans" pitchFamily="2" charset="0"/>
+              </a:rPr>
+              <a:t> Obtention du BTS SIO option SISR (Session 2026).</a:t>
+            </a:r>
+            <a:endParaRPr kumimoji="0" lang="fr-FR" altLang="fr-FR" sz="1750" b="1" i="0" u="none" strike="noStrike" cap="none" normalizeH="0" baseline="0" dirty="0">
+              <a:ln>
+                <a:noFill/>
+              </a:ln>
+              <a:solidFill>
+                <a:schemeClr val="bg1"/>
+              </a:solidFill>
+              <a:effectLst/>
+              <a:latin typeface="Instrument Sans" pitchFamily="2" charset="0"/>
+            </a:endParaRPr>
+          </a:p>
+          <a:p>
+            <a:pPr marL="0" marR="0" lvl="0" indent="0" algn="l" defTabSz="914400" rtl="0" eaLnBrk="0" fontAlgn="base" latinLnBrk="0" hangingPunct="0">
+              <a:lnSpc>
+                <a:spcPct val="100000"/>
+              </a:lnSpc>
+              <a:spcBef>
+                <a:spcPct val="0"/>
+              </a:spcBef>
+              <a:spcAft>
+                <a:spcPct val="0"/>
+              </a:spcAft>
+              <a:buClrTx/>
+              <a:buSzTx/>
+              <a:buFontTx/>
+              <a:buChar char="•"/>
+              <a:tabLst/>
+            </a:pPr>
+            <a:r>
+              <a:rPr kumimoji="0" lang="fr-FR" altLang="fr-FR" sz="1750" b="1" i="0" u="none" strike="noStrike" cap="none" normalizeH="0" baseline="0" dirty="0">
+                <a:ln>
+                  <a:noFill/>
+                </a:ln>
+                <a:solidFill>
+                  <a:schemeClr val="bg1"/>
+                </a:solidFill>
+                <a:effectLst/>
+                <a:latin typeface="Instrument Sans" pitchFamily="2" charset="0"/>
+              </a:rPr>
+              <a:t>Poursuite d'études :</a:t>
+            </a:r>
+            <a:r>
+              <a:rPr kumimoji="0" lang="fr-FR" altLang="fr-FR" sz="1750" b="0" i="0" u="none" strike="noStrike" cap="none" normalizeH="0" baseline="0" dirty="0">
+                <a:ln>
+                  <a:noFill/>
+                </a:ln>
+                <a:solidFill>
+                  <a:schemeClr val="bg1"/>
+                </a:solidFill>
+                <a:effectLst/>
+                <a:latin typeface="Instrument Sans" pitchFamily="2" charset="0"/>
+              </a:rPr>
+              <a:t> Licence Administrateur Systèmes et Réseaux (Bac+3).</a:t>
+            </a:r>
+          </a:p>
+          <a:p>
+            <a:pPr marL="0" marR="0" lvl="0" indent="0" algn="l" defTabSz="914400" rtl="0" eaLnBrk="0" fontAlgn="base" latinLnBrk="0" hangingPunct="0">
+              <a:lnSpc>
+                <a:spcPct val="100000"/>
+              </a:lnSpc>
+              <a:spcBef>
+                <a:spcPct val="0"/>
+              </a:spcBef>
+              <a:spcAft>
+                <a:spcPct val="0"/>
+              </a:spcAft>
+              <a:buClrTx/>
+              <a:buSzTx/>
+              <a:buFontTx/>
+              <a:buChar char="•"/>
+              <a:tabLst/>
+            </a:pPr>
+            <a:r>
+              <a:rPr kumimoji="0" lang="fr-FR" altLang="fr-FR" sz="1750" b="1" i="0" u="none" strike="noStrike" cap="none" normalizeH="0" baseline="0" dirty="0">
+                <a:ln>
+                  <a:noFill/>
+                </a:ln>
+                <a:solidFill>
+                  <a:schemeClr val="bg1"/>
+                </a:solidFill>
+                <a:effectLst/>
+                <a:latin typeface="Instrument Sans" pitchFamily="2" charset="0"/>
+              </a:rPr>
+              <a:t>Rythme souhaité :</a:t>
+            </a:r>
+            <a:r>
+              <a:rPr kumimoji="0" lang="fr-FR" altLang="fr-FR" sz="1750" b="0" i="0" u="none" strike="noStrike" cap="none" normalizeH="0" baseline="0" dirty="0">
+                <a:ln>
+                  <a:noFill/>
+                </a:ln>
+                <a:solidFill>
+                  <a:schemeClr val="bg1"/>
+                </a:solidFill>
+                <a:effectLst/>
+                <a:latin typeface="Instrument Sans" pitchFamily="2" charset="0"/>
+              </a:rPr>
+              <a:t> Contrat d'apprentissage </a:t>
+            </a:r>
+          </a:p>
+          <a:p>
+            <a:pPr marL="0" marR="0" lvl="0" indent="0" algn="l" defTabSz="914400" rtl="0" eaLnBrk="0" fontAlgn="base" latinLnBrk="0" hangingPunct="0">
+              <a:lnSpc>
+                <a:spcPct val="100000"/>
+              </a:lnSpc>
+              <a:spcBef>
+                <a:spcPct val="0"/>
+              </a:spcBef>
+              <a:spcAft>
+                <a:spcPct val="0"/>
+              </a:spcAft>
+              <a:buClrTx/>
+              <a:buSzTx/>
+              <a:buFontTx/>
+              <a:buChar char="•"/>
+              <a:tabLst/>
+            </a:pPr>
+            <a:r>
+              <a:rPr kumimoji="0" lang="fr-FR" altLang="fr-FR" sz="1750" b="1" i="0" u="none" strike="noStrike" cap="none" normalizeH="0" baseline="0" dirty="0">
+                <a:ln>
+                  <a:noFill/>
+                </a:ln>
+                <a:solidFill>
+                  <a:schemeClr val="bg1"/>
+                </a:solidFill>
+                <a:effectLst/>
+                <a:latin typeface="Instrument Sans" pitchFamily="2" charset="0"/>
+              </a:rPr>
+              <a:t>Écoles cibles :</a:t>
+            </a:r>
+            <a:r>
+              <a:rPr kumimoji="0" lang="fr-FR" altLang="fr-FR" sz="1750" b="0" i="0" u="none" strike="noStrike" cap="none" normalizeH="0" baseline="0" dirty="0">
+                <a:ln>
+                  <a:noFill/>
+                </a:ln>
+                <a:solidFill>
+                  <a:schemeClr val="bg1"/>
+                </a:solidFill>
+                <a:effectLst/>
+                <a:latin typeface="Instrument Sans" pitchFamily="2" charset="0"/>
+              </a:rPr>
+              <a:t> CESI ou CCI (Strasbourg).</a:t>
+            </a:r>
+          </a:p>
+          <a:p>
+            <a:pPr marL="0" marR="0" lvl="0" indent="0" algn="l" defTabSz="914400" rtl="0" eaLnBrk="0" fontAlgn="base" latinLnBrk="0" hangingPunct="0">
+              <a:lnSpc>
+                <a:spcPct val="100000"/>
+              </a:lnSpc>
+              <a:spcBef>
+                <a:spcPct val="0"/>
+              </a:spcBef>
+              <a:spcAft>
+                <a:spcPct val="0"/>
+              </a:spcAft>
+              <a:buClrTx/>
+              <a:buSzTx/>
+              <a:buFontTx/>
+              <a:buChar char="•"/>
+              <a:tabLst/>
+            </a:pPr>
+            <a:r>
+              <a:rPr kumimoji="0" lang="fr-FR" altLang="fr-FR" sz="1750" b="1" i="0" u="none" strike="noStrike" cap="none" normalizeH="0" baseline="0" dirty="0">
+                <a:ln>
+                  <a:noFill/>
+                </a:ln>
+                <a:solidFill>
+                  <a:schemeClr val="bg1"/>
+                </a:solidFill>
+                <a:effectLst/>
+                <a:latin typeface="Instrument Sans" pitchFamily="2" charset="0"/>
+              </a:rPr>
+              <a:t>Projet professionnel :</a:t>
+            </a:r>
+            <a:r>
+              <a:rPr kumimoji="0" lang="fr-FR" altLang="fr-FR" sz="1750" b="0" i="0" u="none" strike="noStrike" cap="none" normalizeH="0" baseline="0" dirty="0">
+                <a:ln>
+                  <a:noFill/>
+                </a:ln>
+                <a:solidFill>
+                  <a:schemeClr val="bg1"/>
+                </a:solidFill>
+                <a:effectLst/>
+                <a:latin typeface="Instrument Sans" pitchFamily="2" charset="0"/>
+              </a:rPr>
+              <a:t> Évoluer vers un poste d'Administrateur Systèmes et Réseaux</a:t>
+            </a:r>
           </a:p>
         </p:txBody>
       </p:sp>
@@ -6969,6 +7623,579 @@
 
 <file path=ppt/slides/slide2.xml><?xml version="1.0" encoding="utf-8"?>
 <p:sld xmlns:a="http://schemas.openxmlformats.org/drawingml/2006/main" xmlns:r="http://schemas.openxmlformats.org/officeDocument/2006/relationships" xmlns:p="http://schemas.openxmlformats.org/presentationml/2006/main">
+  <p:cSld name="Slide 3">
+    <p:bg>
+      <p:bgPr>
+        <a:solidFill>
+          <a:srgbClr val="000000"/>
+        </a:solidFill>
+        <a:effectLst/>
+      </p:bgPr>
+    </p:bg>
+    <p:spTree>
+      <p:nvGrpSpPr>
+        <p:cNvPr id="1" name=""/>
+        <p:cNvGrpSpPr/>
+        <p:nvPr/>
+      </p:nvGrpSpPr>
+      <p:grpSpPr>
+        <a:xfrm>
+          <a:off x="0" y="0"/>
+          <a:ext cx="0" cy="0"/>
+          <a:chOff x="0" y="0"/>
+          <a:chExt cx="0" cy="0"/>
+        </a:xfrm>
+      </p:grpSpPr>
+      <p:sp>
+        <p:nvSpPr>
+          <p:cNvPr id="2" name="Text 0"/>
+          <p:cNvSpPr/>
+          <p:nvPr/>
+        </p:nvSpPr>
+        <p:spPr>
+          <a:xfrm>
+            <a:off x="793790" y="1947600"/>
+            <a:ext cx="8023265" cy="708779"/>
+          </a:xfrm>
+          <a:prstGeom prst="rect">
+            <a:avLst/>
+          </a:prstGeom>
+          <a:noFill/>
+          <a:ln/>
+        </p:spPr>
+        <p:txBody>
+          <a:bodyPr wrap="none" lIns="0" tIns="0" rIns="0" bIns="0" rtlCol="0" anchor="t"/>
+          <a:lstStyle/>
+          <a:p>
+            <a:pPr>
+              <a:lnSpc>
+                <a:spcPts val="5550"/>
+              </a:lnSpc>
+            </a:pPr>
+            <a:r>
+              <a:rPr lang="en-US" sz="4800" b="1" dirty="0">
+                <a:gradFill flip="none" rotWithShape="1">
+                  <a:gsLst>
+                    <a:gs pos="0">
+                      <a:srgbClr val="96989C">
+                        <a:alpha val="10196"/>
+                        <a:lumMod val="0"/>
+                        <a:lumOff val="100000"/>
+                      </a:srgbClr>
+                    </a:gs>
+                    <a:gs pos="50000">
+                      <a:schemeClr val="bg1">
+                        <a:shade val="67500"/>
+                        <a:satMod val="115000"/>
+                        <a:lumMod val="70000"/>
+                        <a:lumOff val="30000"/>
+                      </a:schemeClr>
+                    </a:gs>
+                    <a:gs pos="100000">
+                      <a:schemeClr val="bg1">
+                        <a:shade val="100000"/>
+                        <a:satMod val="115000"/>
+                      </a:schemeClr>
+                    </a:gs>
+                  </a:gsLst>
+                  <a:lin ang="2700000" scaled="1"/>
+                  <a:tileRect/>
+                </a:gradFill>
+                <a:latin typeface="Instrument sans" pitchFamily="2" charset="0"/>
+              </a:rPr>
+              <a:t>Mon </a:t>
+            </a:r>
+            <a:r>
+              <a:rPr lang="fr-FR" sz="4800" b="1" dirty="0">
+                <a:gradFill flip="none" rotWithShape="1">
+                  <a:gsLst>
+                    <a:gs pos="0">
+                      <a:srgbClr val="96989C">
+                        <a:alpha val="10196"/>
+                        <a:lumMod val="0"/>
+                        <a:lumOff val="100000"/>
+                      </a:srgbClr>
+                    </a:gs>
+                    <a:gs pos="50000">
+                      <a:schemeClr val="bg1">
+                        <a:shade val="67500"/>
+                        <a:satMod val="115000"/>
+                        <a:lumMod val="70000"/>
+                        <a:lumOff val="30000"/>
+                      </a:schemeClr>
+                    </a:gs>
+                    <a:gs pos="100000">
+                      <a:schemeClr val="bg1">
+                        <a:shade val="100000"/>
+                        <a:satMod val="115000"/>
+                      </a:schemeClr>
+                    </a:gs>
+                  </a:gsLst>
+                  <a:lin ang="2700000" scaled="1"/>
+                  <a:tileRect/>
+                </a:gradFill>
+                <a:latin typeface="Instrument sans" pitchFamily="2" charset="0"/>
+              </a:rPr>
+              <a:t>évolution</a:t>
+            </a:r>
+            <a:r>
+              <a:rPr lang="en-US" sz="4800" b="1" dirty="0">
+                <a:gradFill flip="none" rotWithShape="1">
+                  <a:gsLst>
+                    <a:gs pos="0">
+                      <a:srgbClr val="96989C">
+                        <a:alpha val="10196"/>
+                        <a:lumMod val="0"/>
+                        <a:lumOff val="100000"/>
+                      </a:srgbClr>
+                    </a:gs>
+                    <a:gs pos="50000">
+                      <a:schemeClr val="bg1">
+                        <a:shade val="67500"/>
+                        <a:satMod val="115000"/>
+                        <a:lumMod val="70000"/>
+                        <a:lumOff val="30000"/>
+                      </a:schemeClr>
+                    </a:gs>
+                    <a:gs pos="100000">
+                      <a:schemeClr val="bg1">
+                        <a:shade val="100000"/>
+                        <a:satMod val="115000"/>
+                      </a:schemeClr>
+                    </a:gs>
+                  </a:gsLst>
+                  <a:lin ang="2700000" scaled="1"/>
+                  <a:tileRect/>
+                </a:gradFill>
+                <a:latin typeface="Instrument sans" pitchFamily="2" charset="0"/>
+              </a:rPr>
+              <a:t> </a:t>
+            </a:r>
+            <a:r>
+              <a:rPr lang="fr-FR" sz="4800" b="1" dirty="0">
+                <a:gradFill flip="none" rotWithShape="1">
+                  <a:gsLst>
+                    <a:gs pos="0">
+                      <a:srgbClr val="96989C">
+                        <a:alpha val="10196"/>
+                        <a:lumMod val="0"/>
+                        <a:lumOff val="100000"/>
+                      </a:srgbClr>
+                    </a:gs>
+                    <a:gs pos="50000">
+                      <a:schemeClr val="bg1">
+                        <a:shade val="67500"/>
+                        <a:satMod val="115000"/>
+                        <a:lumMod val="70000"/>
+                        <a:lumOff val="30000"/>
+                      </a:schemeClr>
+                    </a:gs>
+                    <a:gs pos="100000">
+                      <a:schemeClr val="bg1">
+                        <a:shade val="100000"/>
+                        <a:satMod val="115000"/>
+                      </a:schemeClr>
+                    </a:gs>
+                  </a:gsLst>
+                  <a:lin ang="2700000" scaled="1"/>
+                  <a:tileRect/>
+                </a:gradFill>
+                <a:latin typeface="Instrument sans" pitchFamily="2" charset="0"/>
+              </a:rPr>
+              <a:t>professionnelle</a:t>
+            </a:r>
+          </a:p>
+        </p:txBody>
+      </p:sp>
+      <p:sp>
+        <p:nvSpPr>
+          <p:cNvPr id="3" name="Text 1"/>
+          <p:cNvSpPr/>
+          <p:nvPr/>
+        </p:nvSpPr>
+        <p:spPr>
+          <a:xfrm>
+            <a:off x="793790" y="2911316"/>
+            <a:ext cx="13057822" cy="354330"/>
+          </a:xfrm>
+          <a:prstGeom prst="rect">
+            <a:avLst/>
+          </a:prstGeom>
+          <a:noFill/>
+          <a:ln/>
+        </p:spPr>
+        <p:txBody>
+          <a:bodyPr wrap="none" lIns="0" tIns="0" rIns="0" bIns="0" rtlCol="0" anchor="t"/>
+          <a:lstStyle/>
+          <a:p>
+            <a:pPr>
+              <a:lnSpc>
+                <a:spcPts val="2750"/>
+              </a:lnSpc>
+            </a:pPr>
+            <a:r>
+              <a:rPr lang="en-US" sz="2400" b="1" u="sng" dirty="0">
+                <a:solidFill>
+                  <a:schemeClr val="bg1"/>
+                </a:solidFill>
+                <a:latin typeface="Instrument sans" pitchFamily="2" charset="0"/>
+                <a:ea typeface="Instrument Sans Semi Bold" pitchFamily="34" charset="-122"/>
+                <a:cs typeface="Instrument Sans Semi Bold" pitchFamily="34" charset="-120"/>
+              </a:rPr>
+              <a:t>Stage EMHA                                               Stage IGBMC                                              </a:t>
+            </a:r>
+            <a:r>
+              <a:rPr lang="fr-FR" sz="2400" b="1" u="sng" dirty="0">
+                <a:solidFill>
+                  <a:schemeClr val="bg1"/>
+                </a:solidFill>
+                <a:latin typeface="Instrument sans" pitchFamily="2" charset="0"/>
+                <a:ea typeface="Instrument Sans Semi Bold" pitchFamily="34" charset="-122"/>
+                <a:cs typeface="Instrument Sans Semi Bold" pitchFamily="34" charset="-120"/>
+              </a:rPr>
+              <a:t>Parcours</a:t>
+            </a:r>
+            <a:r>
+              <a:rPr lang="en-US" sz="2400" b="1" u="sng" dirty="0">
+                <a:solidFill>
+                  <a:schemeClr val="bg1"/>
+                </a:solidFill>
+                <a:latin typeface="Instrument sans" pitchFamily="2" charset="0"/>
+                <a:ea typeface="Instrument Sans Semi Bold" pitchFamily="34" charset="-122"/>
+                <a:cs typeface="Instrument Sans Semi Bold" pitchFamily="34" charset="-120"/>
+              </a:rPr>
+              <a:t> future                 </a:t>
+            </a:r>
+            <a:endParaRPr lang="en-US" sz="2400" b="1" u="sng" dirty="0">
+              <a:solidFill>
+                <a:schemeClr val="bg1"/>
+              </a:solidFill>
+              <a:latin typeface="Instrument sans" pitchFamily="2" charset="0"/>
+            </a:endParaRPr>
+          </a:p>
+          <a:p>
+            <a:pPr marL="0" indent="0" algn="l">
+              <a:lnSpc>
+                <a:spcPts val="2750"/>
+              </a:lnSpc>
+              <a:buNone/>
+            </a:pPr>
+            <a:endParaRPr lang="en-US" sz="2200" dirty="0">
+              <a:solidFill>
+                <a:schemeClr val="bg1"/>
+              </a:solidFill>
+              <a:latin typeface="Instrument sans" pitchFamily="2" charset="0"/>
+            </a:endParaRPr>
+          </a:p>
+        </p:txBody>
+      </p:sp>
+      <p:sp>
+        <p:nvSpPr>
+          <p:cNvPr id="6" name="Text 4"/>
+          <p:cNvSpPr/>
+          <p:nvPr/>
+        </p:nvSpPr>
+        <p:spPr>
+          <a:xfrm>
+            <a:off x="793790" y="3569017"/>
+            <a:ext cx="3979545" cy="1451610"/>
+          </a:xfrm>
+          <a:prstGeom prst="rect">
+            <a:avLst/>
+          </a:prstGeom>
+          <a:noFill/>
+          <a:ln/>
+        </p:spPr>
+        <p:txBody>
+          <a:bodyPr wrap="square" lIns="0" tIns="0" rIns="0" bIns="0" rtlCol="0" anchor="t"/>
+          <a:lstStyle/>
+          <a:p>
+            <a:pPr marL="0" indent="0" algn="l">
+              <a:lnSpc>
+                <a:spcPts val="2850"/>
+              </a:lnSpc>
+              <a:buNone/>
+            </a:pPr>
+            <a:r>
+              <a:rPr lang="en-US" sz="1750" dirty="0">
+                <a:solidFill>
+                  <a:schemeClr val="bg1"/>
+                </a:solidFill>
+                <a:latin typeface="Instrument sans" pitchFamily="2" charset="0"/>
+                <a:ea typeface="Instrument Sans Medium" pitchFamily="34" charset="-122"/>
+                <a:cs typeface="Instrument Sans Medium" pitchFamily="34" charset="-120"/>
+              </a:rPr>
+              <a:t>Résolution de tickets, préparation de postes de travail, gestion Active Directory. Découverte du travail en mode projet.</a:t>
+            </a:r>
+            <a:endParaRPr lang="en-US" sz="1750" dirty="0">
+              <a:solidFill>
+                <a:schemeClr val="bg1"/>
+              </a:solidFill>
+              <a:latin typeface="Instrument sans" pitchFamily="2" charset="0"/>
+            </a:endParaRPr>
+          </a:p>
+        </p:txBody>
+      </p:sp>
+      <p:sp>
+        <p:nvSpPr>
+          <p:cNvPr id="8" name="Text 6"/>
+          <p:cNvSpPr/>
+          <p:nvPr/>
+        </p:nvSpPr>
+        <p:spPr>
+          <a:xfrm>
+            <a:off x="5334357" y="3356372"/>
+            <a:ext cx="3402330" cy="425291"/>
+          </a:xfrm>
+          <a:prstGeom prst="rect">
+            <a:avLst/>
+          </a:prstGeom>
+          <a:noFill/>
+          <a:ln/>
+        </p:spPr>
+        <p:txBody>
+          <a:bodyPr wrap="none" lIns="0" tIns="0" rIns="0" bIns="0" rtlCol="0" anchor="t"/>
+          <a:lstStyle/>
+          <a:p>
+            <a:pPr marL="0" indent="0" algn="l">
+              <a:lnSpc>
+                <a:spcPts val="3300"/>
+              </a:lnSpc>
+              <a:buNone/>
+            </a:pPr>
+            <a:endParaRPr lang="en-US" sz="2650" dirty="0">
+              <a:solidFill>
+                <a:schemeClr val="bg1"/>
+              </a:solidFill>
+              <a:latin typeface="Instrument sans" pitchFamily="2" charset="0"/>
+            </a:endParaRPr>
+          </a:p>
+        </p:txBody>
+      </p:sp>
+      <p:sp>
+        <p:nvSpPr>
+          <p:cNvPr id="10" name="Text 8"/>
+          <p:cNvSpPr/>
+          <p:nvPr/>
+        </p:nvSpPr>
+        <p:spPr>
+          <a:xfrm>
+            <a:off x="5326142" y="3567261"/>
+            <a:ext cx="3978116" cy="1088708"/>
+          </a:xfrm>
+          <a:prstGeom prst="rect">
+            <a:avLst/>
+          </a:prstGeom>
+          <a:noFill/>
+          <a:ln/>
+        </p:spPr>
+        <p:txBody>
+          <a:bodyPr wrap="square" lIns="0" tIns="0" rIns="0" bIns="0" rtlCol="0" anchor="t"/>
+          <a:lstStyle/>
+          <a:p>
+            <a:pPr marL="0" indent="0" algn="l">
+              <a:lnSpc>
+                <a:spcPts val="2850"/>
+              </a:lnSpc>
+              <a:buNone/>
+            </a:pPr>
+            <a:r>
+              <a:rPr lang="en-US" sz="1750" dirty="0">
+                <a:solidFill>
+                  <a:schemeClr val="bg1"/>
+                </a:solidFill>
+                <a:latin typeface="Instrument sans" pitchFamily="2" charset="0"/>
+                <a:ea typeface="Instrument Sans Medium" pitchFamily="34" charset="-122"/>
+                <a:cs typeface="Instrument Sans Medium" pitchFamily="34" charset="-120"/>
+              </a:rPr>
+              <a:t>Gestion de déploiements lourds d'OS. Configuration avancée de firmwares et automatisation de </a:t>
+            </a:r>
+            <a:r>
+              <a:rPr lang="fr-FR" sz="1750" dirty="0">
+                <a:solidFill>
+                  <a:schemeClr val="bg1"/>
+                </a:solidFill>
+                <a:latin typeface="Instrument sans" pitchFamily="2" charset="0"/>
+                <a:ea typeface="Instrument Sans Medium" pitchFamily="34" charset="-122"/>
+                <a:cs typeface="Instrument Sans Medium" pitchFamily="34" charset="-120"/>
+              </a:rPr>
+              <a:t>tâche</a:t>
+            </a:r>
+            <a:r>
+              <a:rPr lang="en-US" sz="1750" dirty="0">
+                <a:solidFill>
+                  <a:schemeClr val="bg1"/>
+                </a:solidFill>
+                <a:latin typeface="Instrument sans" pitchFamily="2" charset="0"/>
+                <a:ea typeface="Instrument Sans Medium" pitchFamily="34" charset="-122"/>
+                <a:cs typeface="Instrument Sans Medium" pitchFamily="34" charset="-120"/>
+              </a:rPr>
+              <a:t>.</a:t>
+            </a:r>
+            <a:endParaRPr lang="en-US" sz="1750" dirty="0">
+              <a:solidFill>
+                <a:schemeClr val="bg1"/>
+              </a:solidFill>
+              <a:latin typeface="Instrument sans" pitchFamily="2" charset="0"/>
+            </a:endParaRPr>
+          </a:p>
+        </p:txBody>
+      </p:sp>
+      <p:sp>
+        <p:nvSpPr>
+          <p:cNvPr id="14" name="Text 12"/>
+          <p:cNvSpPr/>
+          <p:nvPr/>
+        </p:nvSpPr>
+        <p:spPr>
+          <a:xfrm>
+            <a:off x="9872067" y="3569017"/>
+            <a:ext cx="3978116" cy="725805"/>
+          </a:xfrm>
+          <a:prstGeom prst="rect">
+            <a:avLst/>
+          </a:prstGeom>
+          <a:noFill/>
+          <a:ln/>
+        </p:spPr>
+        <p:txBody>
+          <a:bodyPr wrap="square" lIns="0" tIns="0" rIns="0" bIns="0" rtlCol="0" anchor="t"/>
+          <a:lstStyle/>
+          <a:p>
+            <a:pPr marL="0" indent="0" algn="l">
+              <a:lnSpc>
+                <a:spcPts val="2850"/>
+              </a:lnSpc>
+              <a:buNone/>
+            </a:pPr>
+            <a:r>
+              <a:rPr lang="en-US" sz="1750" dirty="0">
+                <a:solidFill>
+                  <a:schemeClr val="bg1"/>
+                </a:solidFill>
+                <a:latin typeface="Instrument sans" pitchFamily="2" charset="0"/>
+                <a:ea typeface="Instrument Sans Medium" pitchFamily="34" charset="-122"/>
+                <a:cs typeface="Instrument Sans Medium" pitchFamily="34" charset="-120"/>
+              </a:rPr>
+              <a:t>Alternance pour la 3ème </a:t>
+            </a:r>
+            <a:r>
+              <a:rPr lang="fr-FR" sz="1750" dirty="0">
+                <a:solidFill>
+                  <a:schemeClr val="bg1"/>
+                </a:solidFill>
+                <a:latin typeface="Instrument sans" pitchFamily="2" charset="0"/>
+                <a:ea typeface="Instrument Sans Medium" pitchFamily="34" charset="-122"/>
+                <a:cs typeface="Instrument Sans Medium" pitchFamily="34" charset="-120"/>
+              </a:rPr>
+              <a:t>année</a:t>
+            </a:r>
+            <a:r>
+              <a:rPr lang="en-US" sz="1750" dirty="0">
+                <a:solidFill>
+                  <a:schemeClr val="bg1"/>
+                </a:solidFill>
+                <a:latin typeface="Instrument sans" pitchFamily="2" charset="0"/>
+                <a:ea typeface="Instrument Sans Medium" pitchFamily="34" charset="-122"/>
+                <a:cs typeface="Instrument Sans Medium" pitchFamily="34" charset="-120"/>
+              </a:rPr>
+              <a:t>.</a:t>
+            </a:r>
+          </a:p>
+          <a:p>
+            <a:pPr marL="0" indent="0" algn="l">
+              <a:lnSpc>
+                <a:spcPts val="2850"/>
+              </a:lnSpc>
+              <a:buNone/>
+            </a:pPr>
+            <a:r>
+              <a:rPr lang="en-US" sz="1750" dirty="0">
+                <a:solidFill>
+                  <a:schemeClr val="bg1"/>
+                </a:solidFill>
+                <a:latin typeface="Instrument sans" pitchFamily="2" charset="0"/>
+                <a:ea typeface="Instrument Sans Medium" pitchFamily="34" charset="-122"/>
+                <a:cs typeface="Instrument Sans Medium" pitchFamily="34" charset="-120"/>
+              </a:rPr>
+              <a:t>L'école sera le CESI ou CCI</a:t>
+            </a:r>
+            <a:endParaRPr lang="en-US" sz="1750" dirty="0">
+              <a:solidFill>
+                <a:schemeClr val="bg1"/>
+              </a:solidFill>
+              <a:latin typeface="Instrument sans" pitchFamily="2" charset="0"/>
+            </a:endParaRPr>
+          </a:p>
+        </p:txBody>
+      </p:sp>
+      <p:sp>
+        <p:nvSpPr>
+          <p:cNvPr id="15" name="Rectangle 14">
+            <a:extLst>
+              <a:ext uri="{FF2B5EF4-FFF2-40B4-BE49-F238E27FC236}">
+                <a16:creationId xmlns:a16="http://schemas.microsoft.com/office/drawing/2014/main" id="{021C7776-5ED4-4344-8772-C0E8CC293299}"/>
+              </a:ext>
+            </a:extLst>
+          </p:cNvPr>
+          <p:cNvSpPr/>
+          <p:nvPr/>
+        </p:nvSpPr>
+        <p:spPr>
+          <a:xfrm>
+            <a:off x="12775168" y="7717134"/>
+            <a:ext cx="1855232" cy="512466"/>
+          </a:xfrm>
+          <a:prstGeom prst="rect">
+            <a:avLst/>
+          </a:prstGeom>
+          <a:solidFill>
+            <a:srgbClr val="29292C"/>
+          </a:solidFill>
+          <a:ln>
+            <a:noFill/>
+          </a:ln>
+        </p:spPr>
+        <p:style>
+          <a:lnRef idx="2">
+            <a:schemeClr val="accent1">
+              <a:shade val="50000"/>
+            </a:schemeClr>
+          </a:lnRef>
+          <a:fillRef idx="1">
+            <a:schemeClr val="accent1"/>
+          </a:fillRef>
+          <a:effectRef idx="0">
+            <a:schemeClr val="accent1"/>
+          </a:effectRef>
+          <a:fontRef idx="minor">
+            <a:schemeClr val="lt1"/>
+          </a:fontRef>
+        </p:style>
+        <p:txBody>
+          <a:bodyPr rtlCol="0" anchor="ctr"/>
+          <a:lstStyle/>
+          <a:p>
+            <a:pPr algn="ctr"/>
+            <a:endParaRPr lang="fr-FR" dirty="0">
+              <a:solidFill>
+                <a:schemeClr val="bg1"/>
+              </a:solidFill>
+              <a:latin typeface="Instrument sans" pitchFamily="2" charset="0"/>
+            </a:endParaRPr>
+          </a:p>
+        </p:txBody>
+      </p:sp>
+    </p:spTree>
+  </p:cSld>
+  <p:clrMapOvr>
+    <a:masterClrMapping/>
+  </p:clrMapOvr>
+</p:sld>
+</file>
+
+<file path=ppt/slides/slide3.xml><?xml version="1.0" encoding="utf-8"?>
+<p:sld xmlns:a="http://schemas.openxmlformats.org/drawingml/2006/main" xmlns:r="http://schemas.openxmlformats.org/officeDocument/2006/relationships" xmlns:p="http://schemas.openxmlformats.org/presentationml/2006/main">
   <p:cSld name="Slide 2">
     <p:bg>
       <p:bgPr>
@@ -7583,579 +8810,6 @@
             <a:extLst>
               <a:ext uri="{FF2B5EF4-FFF2-40B4-BE49-F238E27FC236}">
                 <a16:creationId xmlns:a16="http://schemas.microsoft.com/office/drawing/2014/main" id="{726C904A-2871-426C-A702-0D2A29CAC2C5}"/>
-              </a:ext>
-            </a:extLst>
-          </p:cNvPr>
-          <p:cNvSpPr/>
-          <p:nvPr/>
-        </p:nvSpPr>
-        <p:spPr>
-          <a:xfrm>
-            <a:off x="12775168" y="7717134"/>
-            <a:ext cx="1855232" cy="512466"/>
-          </a:xfrm>
-          <a:prstGeom prst="rect">
-            <a:avLst/>
-          </a:prstGeom>
-          <a:solidFill>
-            <a:srgbClr val="29292C"/>
-          </a:solidFill>
-          <a:ln>
-            <a:noFill/>
-          </a:ln>
-        </p:spPr>
-        <p:style>
-          <a:lnRef idx="2">
-            <a:schemeClr val="accent1">
-              <a:shade val="50000"/>
-            </a:schemeClr>
-          </a:lnRef>
-          <a:fillRef idx="1">
-            <a:schemeClr val="accent1"/>
-          </a:fillRef>
-          <a:effectRef idx="0">
-            <a:schemeClr val="accent1"/>
-          </a:effectRef>
-          <a:fontRef idx="minor">
-            <a:schemeClr val="lt1"/>
-          </a:fontRef>
-        </p:style>
-        <p:txBody>
-          <a:bodyPr rtlCol="0" anchor="ctr"/>
-          <a:lstStyle/>
-          <a:p>
-            <a:pPr algn="ctr"/>
-            <a:endParaRPr lang="fr-FR" dirty="0">
-              <a:solidFill>
-                <a:schemeClr val="bg1"/>
-              </a:solidFill>
-              <a:latin typeface="Instrument sans" pitchFamily="2" charset="0"/>
-            </a:endParaRPr>
-          </a:p>
-        </p:txBody>
-      </p:sp>
-    </p:spTree>
-  </p:cSld>
-  <p:clrMapOvr>
-    <a:masterClrMapping/>
-  </p:clrMapOvr>
-</p:sld>
-</file>
-
-<file path=ppt/slides/slide3.xml><?xml version="1.0" encoding="utf-8"?>
-<p:sld xmlns:a="http://schemas.openxmlformats.org/drawingml/2006/main" xmlns:r="http://schemas.openxmlformats.org/officeDocument/2006/relationships" xmlns:p="http://schemas.openxmlformats.org/presentationml/2006/main">
-  <p:cSld name="Slide 3">
-    <p:bg>
-      <p:bgPr>
-        <a:solidFill>
-          <a:srgbClr val="000000"/>
-        </a:solidFill>
-        <a:effectLst/>
-      </p:bgPr>
-    </p:bg>
-    <p:spTree>
-      <p:nvGrpSpPr>
-        <p:cNvPr id="1" name=""/>
-        <p:cNvGrpSpPr/>
-        <p:nvPr/>
-      </p:nvGrpSpPr>
-      <p:grpSpPr>
-        <a:xfrm>
-          <a:off x="0" y="0"/>
-          <a:ext cx="0" cy="0"/>
-          <a:chOff x="0" y="0"/>
-          <a:chExt cx="0" cy="0"/>
-        </a:xfrm>
-      </p:grpSpPr>
-      <p:sp>
-        <p:nvSpPr>
-          <p:cNvPr id="2" name="Text 0"/>
-          <p:cNvSpPr/>
-          <p:nvPr/>
-        </p:nvSpPr>
-        <p:spPr>
-          <a:xfrm>
-            <a:off x="793790" y="1947600"/>
-            <a:ext cx="8023265" cy="708779"/>
-          </a:xfrm>
-          <a:prstGeom prst="rect">
-            <a:avLst/>
-          </a:prstGeom>
-          <a:noFill/>
-          <a:ln/>
-        </p:spPr>
-        <p:txBody>
-          <a:bodyPr wrap="none" lIns="0" tIns="0" rIns="0" bIns="0" rtlCol="0" anchor="t"/>
-          <a:lstStyle/>
-          <a:p>
-            <a:pPr>
-              <a:lnSpc>
-                <a:spcPts val="5550"/>
-              </a:lnSpc>
-            </a:pPr>
-            <a:r>
-              <a:rPr lang="en-US" sz="4800" b="1" dirty="0">
-                <a:gradFill flip="none" rotWithShape="1">
-                  <a:gsLst>
-                    <a:gs pos="0">
-                      <a:srgbClr val="96989C">
-                        <a:alpha val="10196"/>
-                        <a:lumMod val="0"/>
-                        <a:lumOff val="100000"/>
-                      </a:srgbClr>
-                    </a:gs>
-                    <a:gs pos="50000">
-                      <a:schemeClr val="bg1">
-                        <a:shade val="67500"/>
-                        <a:satMod val="115000"/>
-                        <a:lumMod val="70000"/>
-                        <a:lumOff val="30000"/>
-                      </a:schemeClr>
-                    </a:gs>
-                    <a:gs pos="100000">
-                      <a:schemeClr val="bg1">
-                        <a:shade val="100000"/>
-                        <a:satMod val="115000"/>
-                      </a:schemeClr>
-                    </a:gs>
-                  </a:gsLst>
-                  <a:lin ang="2700000" scaled="1"/>
-                  <a:tileRect/>
-                </a:gradFill>
-                <a:latin typeface="Instrument sans" pitchFamily="2" charset="0"/>
-              </a:rPr>
-              <a:t>Mon </a:t>
-            </a:r>
-            <a:r>
-              <a:rPr lang="fr-FR" sz="4800" b="1" dirty="0">
-                <a:gradFill flip="none" rotWithShape="1">
-                  <a:gsLst>
-                    <a:gs pos="0">
-                      <a:srgbClr val="96989C">
-                        <a:alpha val="10196"/>
-                        <a:lumMod val="0"/>
-                        <a:lumOff val="100000"/>
-                      </a:srgbClr>
-                    </a:gs>
-                    <a:gs pos="50000">
-                      <a:schemeClr val="bg1">
-                        <a:shade val="67500"/>
-                        <a:satMod val="115000"/>
-                        <a:lumMod val="70000"/>
-                        <a:lumOff val="30000"/>
-                      </a:schemeClr>
-                    </a:gs>
-                    <a:gs pos="100000">
-                      <a:schemeClr val="bg1">
-                        <a:shade val="100000"/>
-                        <a:satMod val="115000"/>
-                      </a:schemeClr>
-                    </a:gs>
-                  </a:gsLst>
-                  <a:lin ang="2700000" scaled="1"/>
-                  <a:tileRect/>
-                </a:gradFill>
-                <a:latin typeface="Instrument sans" pitchFamily="2" charset="0"/>
-              </a:rPr>
-              <a:t>évolution</a:t>
-            </a:r>
-            <a:r>
-              <a:rPr lang="en-US" sz="4800" b="1" dirty="0">
-                <a:gradFill flip="none" rotWithShape="1">
-                  <a:gsLst>
-                    <a:gs pos="0">
-                      <a:srgbClr val="96989C">
-                        <a:alpha val="10196"/>
-                        <a:lumMod val="0"/>
-                        <a:lumOff val="100000"/>
-                      </a:srgbClr>
-                    </a:gs>
-                    <a:gs pos="50000">
-                      <a:schemeClr val="bg1">
-                        <a:shade val="67500"/>
-                        <a:satMod val="115000"/>
-                        <a:lumMod val="70000"/>
-                        <a:lumOff val="30000"/>
-                      </a:schemeClr>
-                    </a:gs>
-                    <a:gs pos="100000">
-                      <a:schemeClr val="bg1">
-                        <a:shade val="100000"/>
-                        <a:satMod val="115000"/>
-                      </a:schemeClr>
-                    </a:gs>
-                  </a:gsLst>
-                  <a:lin ang="2700000" scaled="1"/>
-                  <a:tileRect/>
-                </a:gradFill>
-                <a:latin typeface="Instrument sans" pitchFamily="2" charset="0"/>
-              </a:rPr>
-              <a:t> </a:t>
-            </a:r>
-            <a:r>
-              <a:rPr lang="fr-FR" sz="4800" b="1" dirty="0">
-                <a:gradFill flip="none" rotWithShape="1">
-                  <a:gsLst>
-                    <a:gs pos="0">
-                      <a:srgbClr val="96989C">
-                        <a:alpha val="10196"/>
-                        <a:lumMod val="0"/>
-                        <a:lumOff val="100000"/>
-                      </a:srgbClr>
-                    </a:gs>
-                    <a:gs pos="50000">
-                      <a:schemeClr val="bg1">
-                        <a:shade val="67500"/>
-                        <a:satMod val="115000"/>
-                        <a:lumMod val="70000"/>
-                        <a:lumOff val="30000"/>
-                      </a:schemeClr>
-                    </a:gs>
-                    <a:gs pos="100000">
-                      <a:schemeClr val="bg1">
-                        <a:shade val="100000"/>
-                        <a:satMod val="115000"/>
-                      </a:schemeClr>
-                    </a:gs>
-                  </a:gsLst>
-                  <a:lin ang="2700000" scaled="1"/>
-                  <a:tileRect/>
-                </a:gradFill>
-                <a:latin typeface="Instrument sans" pitchFamily="2" charset="0"/>
-              </a:rPr>
-              <a:t>professionnelle</a:t>
-            </a:r>
-          </a:p>
-        </p:txBody>
-      </p:sp>
-      <p:sp>
-        <p:nvSpPr>
-          <p:cNvPr id="3" name="Text 1"/>
-          <p:cNvSpPr/>
-          <p:nvPr/>
-        </p:nvSpPr>
-        <p:spPr>
-          <a:xfrm>
-            <a:off x="793790" y="2911316"/>
-            <a:ext cx="13057822" cy="354330"/>
-          </a:xfrm>
-          <a:prstGeom prst="rect">
-            <a:avLst/>
-          </a:prstGeom>
-          <a:noFill/>
-          <a:ln/>
-        </p:spPr>
-        <p:txBody>
-          <a:bodyPr wrap="none" lIns="0" tIns="0" rIns="0" bIns="0" rtlCol="0" anchor="t"/>
-          <a:lstStyle/>
-          <a:p>
-            <a:pPr>
-              <a:lnSpc>
-                <a:spcPts val="2750"/>
-              </a:lnSpc>
-            </a:pPr>
-            <a:r>
-              <a:rPr lang="en-US" sz="2400" b="1" u="sng" dirty="0">
-                <a:solidFill>
-                  <a:schemeClr val="bg1"/>
-                </a:solidFill>
-                <a:latin typeface="Instrument sans" pitchFamily="2" charset="0"/>
-                <a:ea typeface="Instrument Sans Semi Bold" pitchFamily="34" charset="-122"/>
-                <a:cs typeface="Instrument Sans Semi Bold" pitchFamily="34" charset="-120"/>
-              </a:rPr>
-              <a:t>Stage EMHA                                               Stage IGBMC                                              </a:t>
-            </a:r>
-            <a:r>
-              <a:rPr lang="fr-FR" sz="2400" b="1" u="sng" dirty="0">
-                <a:solidFill>
-                  <a:schemeClr val="bg1"/>
-                </a:solidFill>
-                <a:latin typeface="Instrument sans" pitchFamily="2" charset="0"/>
-                <a:ea typeface="Instrument Sans Semi Bold" pitchFamily="34" charset="-122"/>
-                <a:cs typeface="Instrument Sans Semi Bold" pitchFamily="34" charset="-120"/>
-              </a:rPr>
-              <a:t>Parcours</a:t>
-            </a:r>
-            <a:r>
-              <a:rPr lang="en-US" sz="2400" b="1" u="sng" dirty="0">
-                <a:solidFill>
-                  <a:schemeClr val="bg1"/>
-                </a:solidFill>
-                <a:latin typeface="Instrument sans" pitchFamily="2" charset="0"/>
-                <a:ea typeface="Instrument Sans Semi Bold" pitchFamily="34" charset="-122"/>
-                <a:cs typeface="Instrument Sans Semi Bold" pitchFamily="34" charset="-120"/>
-              </a:rPr>
-              <a:t> future                 </a:t>
-            </a:r>
-            <a:endParaRPr lang="en-US" sz="2400" b="1" u="sng" dirty="0">
-              <a:solidFill>
-                <a:schemeClr val="bg1"/>
-              </a:solidFill>
-              <a:latin typeface="Instrument sans" pitchFamily="2" charset="0"/>
-            </a:endParaRPr>
-          </a:p>
-          <a:p>
-            <a:pPr marL="0" indent="0" algn="l">
-              <a:lnSpc>
-                <a:spcPts val="2750"/>
-              </a:lnSpc>
-              <a:buNone/>
-            </a:pPr>
-            <a:endParaRPr lang="en-US" sz="2200" dirty="0">
-              <a:solidFill>
-                <a:schemeClr val="bg1"/>
-              </a:solidFill>
-              <a:latin typeface="Instrument sans" pitchFamily="2" charset="0"/>
-            </a:endParaRPr>
-          </a:p>
-        </p:txBody>
-      </p:sp>
-      <p:sp>
-        <p:nvSpPr>
-          <p:cNvPr id="6" name="Text 4"/>
-          <p:cNvSpPr/>
-          <p:nvPr/>
-        </p:nvSpPr>
-        <p:spPr>
-          <a:xfrm>
-            <a:off x="793790" y="3569017"/>
-            <a:ext cx="3979545" cy="1451610"/>
-          </a:xfrm>
-          <a:prstGeom prst="rect">
-            <a:avLst/>
-          </a:prstGeom>
-          <a:noFill/>
-          <a:ln/>
-        </p:spPr>
-        <p:txBody>
-          <a:bodyPr wrap="square" lIns="0" tIns="0" rIns="0" bIns="0" rtlCol="0" anchor="t"/>
-          <a:lstStyle/>
-          <a:p>
-            <a:pPr marL="0" indent="0" algn="l">
-              <a:lnSpc>
-                <a:spcPts val="2850"/>
-              </a:lnSpc>
-              <a:buNone/>
-            </a:pPr>
-            <a:r>
-              <a:rPr lang="en-US" sz="1750" dirty="0">
-                <a:solidFill>
-                  <a:schemeClr val="bg1"/>
-                </a:solidFill>
-                <a:latin typeface="Instrument sans" pitchFamily="2" charset="0"/>
-                <a:ea typeface="Instrument Sans Medium" pitchFamily="34" charset="-122"/>
-                <a:cs typeface="Instrument Sans Medium" pitchFamily="34" charset="-120"/>
-              </a:rPr>
-              <a:t>Résolution de tickets, préparation de postes de travail, gestion Active Directory. Découverte du travail en mode projet.</a:t>
-            </a:r>
-            <a:endParaRPr lang="en-US" sz="1750" dirty="0">
-              <a:solidFill>
-                <a:schemeClr val="bg1"/>
-              </a:solidFill>
-              <a:latin typeface="Instrument sans" pitchFamily="2" charset="0"/>
-            </a:endParaRPr>
-          </a:p>
-        </p:txBody>
-      </p:sp>
-      <p:sp>
-        <p:nvSpPr>
-          <p:cNvPr id="8" name="Text 6"/>
-          <p:cNvSpPr/>
-          <p:nvPr/>
-        </p:nvSpPr>
-        <p:spPr>
-          <a:xfrm>
-            <a:off x="5334357" y="3356372"/>
-            <a:ext cx="3402330" cy="425291"/>
-          </a:xfrm>
-          <a:prstGeom prst="rect">
-            <a:avLst/>
-          </a:prstGeom>
-          <a:noFill/>
-          <a:ln/>
-        </p:spPr>
-        <p:txBody>
-          <a:bodyPr wrap="none" lIns="0" tIns="0" rIns="0" bIns="0" rtlCol="0" anchor="t"/>
-          <a:lstStyle/>
-          <a:p>
-            <a:pPr marL="0" indent="0" algn="l">
-              <a:lnSpc>
-                <a:spcPts val="3300"/>
-              </a:lnSpc>
-              <a:buNone/>
-            </a:pPr>
-            <a:endParaRPr lang="en-US" sz="2650" dirty="0">
-              <a:solidFill>
-                <a:schemeClr val="bg1"/>
-              </a:solidFill>
-              <a:latin typeface="Instrument sans" pitchFamily="2" charset="0"/>
-            </a:endParaRPr>
-          </a:p>
-        </p:txBody>
-      </p:sp>
-      <p:sp>
-        <p:nvSpPr>
-          <p:cNvPr id="10" name="Text 8"/>
-          <p:cNvSpPr/>
-          <p:nvPr/>
-        </p:nvSpPr>
-        <p:spPr>
-          <a:xfrm>
-            <a:off x="5326142" y="3567261"/>
-            <a:ext cx="3978116" cy="1088708"/>
-          </a:xfrm>
-          <a:prstGeom prst="rect">
-            <a:avLst/>
-          </a:prstGeom>
-          <a:noFill/>
-          <a:ln/>
-        </p:spPr>
-        <p:txBody>
-          <a:bodyPr wrap="square" lIns="0" tIns="0" rIns="0" bIns="0" rtlCol="0" anchor="t"/>
-          <a:lstStyle/>
-          <a:p>
-            <a:pPr marL="0" indent="0" algn="l">
-              <a:lnSpc>
-                <a:spcPts val="2850"/>
-              </a:lnSpc>
-              <a:buNone/>
-            </a:pPr>
-            <a:r>
-              <a:rPr lang="en-US" sz="1750" dirty="0">
-                <a:solidFill>
-                  <a:schemeClr val="bg1"/>
-                </a:solidFill>
-                <a:latin typeface="Instrument sans" pitchFamily="2" charset="0"/>
-                <a:ea typeface="Instrument Sans Medium" pitchFamily="34" charset="-122"/>
-                <a:cs typeface="Instrument Sans Medium" pitchFamily="34" charset="-120"/>
-              </a:rPr>
-              <a:t>Gestion de déploiements lourds d'OS. Configuration avancée de firmwares et automatisation de </a:t>
-            </a:r>
-            <a:r>
-              <a:rPr lang="fr-FR" sz="1750" dirty="0">
-                <a:solidFill>
-                  <a:schemeClr val="bg1"/>
-                </a:solidFill>
-                <a:latin typeface="Instrument sans" pitchFamily="2" charset="0"/>
-                <a:ea typeface="Instrument Sans Medium" pitchFamily="34" charset="-122"/>
-                <a:cs typeface="Instrument Sans Medium" pitchFamily="34" charset="-120"/>
-              </a:rPr>
-              <a:t>tâche</a:t>
-            </a:r>
-            <a:r>
-              <a:rPr lang="en-US" sz="1750" dirty="0">
-                <a:solidFill>
-                  <a:schemeClr val="bg1"/>
-                </a:solidFill>
-                <a:latin typeface="Instrument sans" pitchFamily="2" charset="0"/>
-                <a:ea typeface="Instrument Sans Medium" pitchFamily="34" charset="-122"/>
-                <a:cs typeface="Instrument Sans Medium" pitchFamily="34" charset="-120"/>
-              </a:rPr>
-              <a:t>.</a:t>
-            </a:r>
-            <a:endParaRPr lang="en-US" sz="1750" dirty="0">
-              <a:solidFill>
-                <a:schemeClr val="bg1"/>
-              </a:solidFill>
-              <a:latin typeface="Instrument sans" pitchFamily="2" charset="0"/>
-            </a:endParaRPr>
-          </a:p>
-        </p:txBody>
-      </p:sp>
-      <p:sp>
-        <p:nvSpPr>
-          <p:cNvPr id="14" name="Text 12"/>
-          <p:cNvSpPr/>
-          <p:nvPr/>
-        </p:nvSpPr>
-        <p:spPr>
-          <a:xfrm>
-            <a:off x="9872067" y="3569017"/>
-            <a:ext cx="3978116" cy="725805"/>
-          </a:xfrm>
-          <a:prstGeom prst="rect">
-            <a:avLst/>
-          </a:prstGeom>
-          <a:noFill/>
-          <a:ln/>
-        </p:spPr>
-        <p:txBody>
-          <a:bodyPr wrap="square" lIns="0" tIns="0" rIns="0" bIns="0" rtlCol="0" anchor="t"/>
-          <a:lstStyle/>
-          <a:p>
-            <a:pPr marL="0" indent="0" algn="l">
-              <a:lnSpc>
-                <a:spcPts val="2850"/>
-              </a:lnSpc>
-              <a:buNone/>
-            </a:pPr>
-            <a:r>
-              <a:rPr lang="en-US" sz="1750" dirty="0">
-                <a:solidFill>
-                  <a:schemeClr val="bg1"/>
-                </a:solidFill>
-                <a:latin typeface="Instrument sans" pitchFamily="2" charset="0"/>
-                <a:ea typeface="Instrument Sans Medium" pitchFamily="34" charset="-122"/>
-                <a:cs typeface="Instrument Sans Medium" pitchFamily="34" charset="-120"/>
-              </a:rPr>
-              <a:t>Alternance pour la 3ème </a:t>
-            </a:r>
-            <a:r>
-              <a:rPr lang="fr-FR" sz="1750" dirty="0">
-                <a:solidFill>
-                  <a:schemeClr val="bg1"/>
-                </a:solidFill>
-                <a:latin typeface="Instrument sans" pitchFamily="2" charset="0"/>
-                <a:ea typeface="Instrument Sans Medium" pitchFamily="34" charset="-122"/>
-                <a:cs typeface="Instrument Sans Medium" pitchFamily="34" charset="-120"/>
-              </a:rPr>
-              <a:t>année</a:t>
-            </a:r>
-            <a:r>
-              <a:rPr lang="en-US" sz="1750" dirty="0">
-                <a:solidFill>
-                  <a:schemeClr val="bg1"/>
-                </a:solidFill>
-                <a:latin typeface="Instrument sans" pitchFamily="2" charset="0"/>
-                <a:ea typeface="Instrument Sans Medium" pitchFamily="34" charset="-122"/>
-                <a:cs typeface="Instrument Sans Medium" pitchFamily="34" charset="-120"/>
-              </a:rPr>
-              <a:t>.</a:t>
-            </a:r>
-          </a:p>
-          <a:p>
-            <a:pPr marL="0" indent="0" algn="l">
-              <a:lnSpc>
-                <a:spcPts val="2850"/>
-              </a:lnSpc>
-              <a:buNone/>
-            </a:pPr>
-            <a:r>
-              <a:rPr lang="en-US" sz="1750" dirty="0">
-                <a:solidFill>
-                  <a:schemeClr val="bg1"/>
-                </a:solidFill>
-                <a:latin typeface="Instrument sans" pitchFamily="2" charset="0"/>
-                <a:ea typeface="Instrument Sans Medium" pitchFamily="34" charset="-122"/>
-                <a:cs typeface="Instrument Sans Medium" pitchFamily="34" charset="-120"/>
-              </a:rPr>
-              <a:t>L'école sera le CESI ou CCI</a:t>
-            </a:r>
-            <a:endParaRPr lang="en-US" sz="1750" dirty="0">
-              <a:solidFill>
-                <a:schemeClr val="bg1"/>
-              </a:solidFill>
-              <a:latin typeface="Instrument sans" pitchFamily="2" charset="0"/>
-            </a:endParaRPr>
-          </a:p>
-        </p:txBody>
-      </p:sp>
-      <p:sp>
-        <p:nvSpPr>
-          <p:cNvPr id="15" name="Rectangle 14">
-            <a:extLst>
-              <a:ext uri="{FF2B5EF4-FFF2-40B4-BE49-F238E27FC236}">
-                <a16:creationId xmlns:a16="http://schemas.microsoft.com/office/drawing/2014/main" id="{021C7776-5ED4-4344-8772-C0E8CC293299}"/>
               </a:ext>
             </a:extLst>
           </p:cNvPr>
